--- a/media/exports/reports/2025-11/growth-services.pptx
+++ b/media/exports/reports/2025-11/growth-services.pptx
@@ -216,46 +216,46 @@
                 <c:formatCode>$#,##0;[Red]($#,##0);"-"</c:formatCode>
                 <c:ptCount val="14"/>
                 <c:pt idx="0">
-                  <c:v>94520</c:v>
+                  <c:v>103550</c:v>
                 </c:pt>
                 <c:pt idx="1">
-                  <c:v>108140</c:v>
+                  <c:v>118390</c:v>
                 </c:pt>
                 <c:pt idx="2">
-                  <c:v>114895</c:v>
+                  <c:v>125715</c:v>
                 </c:pt>
                 <c:pt idx="3">
-                  <c:v>88250</c:v>
+                  <c:v>96560</c:v>
                 </c:pt>
                 <c:pt idx="4">
-                  <c:v>111010</c:v>
+                  <c:v>121275</c:v>
                 </c:pt>
                 <c:pt idx="5">
-                  <c:v>77175</c:v>
+                  <c:v>84340</c:v>
                 </c:pt>
                 <c:pt idx="6">
-                  <c:v>63970</c:v>
+                  <c:v>69985</c:v>
                 </c:pt>
                 <c:pt idx="7">
-                  <c:v>95555</c:v>
+                  <c:v>104970</c:v>
                 </c:pt>
                 <c:pt idx="8">
-                  <c:v>90220</c:v>
+                  <c:v>99060</c:v>
                 </c:pt>
                 <c:pt idx="9">
-                  <c:v>86320</c:v>
+                  <c:v>94805</c:v>
                 </c:pt>
                 <c:pt idx="10">
-                  <c:v>61475</c:v>
+                  <c:v>67745</c:v>
                 </c:pt>
                 <c:pt idx="11">
-                  <c:v>59535</c:v>
+                  <c:v>65650</c:v>
                 </c:pt>
                 <c:pt idx="12">
-                  <c:v>71260</c:v>
+                  <c:v>78550</c:v>
                 </c:pt>
                 <c:pt idx="13">
-                  <c:v>83940</c:v>
+                  <c:v>92575</c:v>
                 </c:pt>
               </c:numCache>
             </c:numRef>
@@ -304,7 +304,7 @@
         <c:axId val="-2100718248"/>
         <c:scaling>
           <c:orientation val="minMax"/>
-          <c:max val="125000.0"/>
+          <c:max val="150000.0"/>
           <c:min val="0.0"/>
         </c:scaling>
         <c:delete val="0"/>
@@ -339,7 +339,7 @@
         <c:crossAx val="-2101159928"/>
         <c:crosses val="autoZero"/>
         <c:crossBetween val="midCat"/>
-        <c:majorUnit val="25000.0"/>
+        <c:majorUnit val="50000.0"/>
       </c:valAx>
     </c:plotArea>
     <c:plotVisOnly val="1"/>
@@ -468,46 +468,46 @@
                 <c:formatCode>$#,##0;[Red]($#,##0);"-"</c:formatCode>
                 <c:ptCount val="14"/>
                 <c:pt idx="0">
-                  <c:v>70720</c:v>
+                  <c:v>77350</c:v>
                 </c:pt>
                 <c:pt idx="1">
-                  <c:v>88540</c:v>
+                  <c:v>96790</c:v>
                 </c:pt>
                 <c:pt idx="2">
-                  <c:v>94695</c:v>
+                  <c:v>103515</c:v>
                 </c:pt>
                 <c:pt idx="3">
-                  <c:v>66850</c:v>
+                  <c:v>73060</c:v>
                 </c:pt>
                 <c:pt idx="4">
-                  <c:v>84410</c:v>
+                  <c:v>92075</c:v>
                 </c:pt>
                 <c:pt idx="5">
-                  <c:v>48975</c:v>
+                  <c:v>53340</c:v>
                 </c:pt>
                 <c:pt idx="6">
-                  <c:v>37570</c:v>
+                  <c:v>40885</c:v>
                 </c:pt>
                 <c:pt idx="7">
-                  <c:v>59755</c:v>
+                  <c:v>65570</c:v>
                 </c:pt>
                 <c:pt idx="8">
-                  <c:v>64520</c:v>
+                  <c:v>70760</c:v>
                 </c:pt>
                 <c:pt idx="9">
-                  <c:v>64820</c:v>
+                  <c:v>71205</c:v>
                 </c:pt>
                 <c:pt idx="10">
-                  <c:v>38775</c:v>
+                  <c:v>42845</c:v>
                 </c:pt>
                 <c:pt idx="11">
-                  <c:v>38035</c:v>
+                  <c:v>42050</c:v>
                 </c:pt>
                 <c:pt idx="12">
-                  <c:v>45860</c:v>
+                  <c:v>50650</c:v>
                 </c:pt>
                 <c:pt idx="13">
-                  <c:v>46840</c:v>
+                  <c:v>51775</c:v>
                 </c:pt>
               </c:numCache>
             </c:numRef>
@@ -556,7 +556,7 @@
         <c:axId val="-2100718248"/>
         <c:scaling>
           <c:orientation val="minMax"/>
-          <c:max val="100000.0"/>
+          <c:max val="125000.0"/>
           <c:min val="0.0"/>
         </c:scaling>
         <c:delete val="0"/>
@@ -591,7 +591,7 @@
         <c:crossAx val="-2101159928"/>
         <c:crosses val="autoZero"/>
         <c:crossBetween val="midCat"/>
-        <c:majorUnit val="20000.0"/>
+        <c:majorUnit val="25000.0"/>
       </c:valAx>
     </c:plotArea>
     <c:plotVisOnly val="1"/>
@@ -720,46 +720,46 @@
                 <c:formatCode>$#,##0;[Red]($#,##0);"-"</c:formatCode>
                 <c:ptCount val="14"/>
                 <c:pt idx="0">
-                  <c:v>15000</c:v>
+                  <c:v>16500</c:v>
                 </c:pt>
                 <c:pt idx="1">
-                  <c:v>15000</c:v>
+                  <c:v>16500</c:v>
                 </c:pt>
                 <c:pt idx="2">
-                  <c:v>15000</c:v>
+                  <c:v>16500</c:v>
                 </c:pt>
                 <c:pt idx="3">
-                  <c:v>15000</c:v>
+                  <c:v>16500</c:v>
                 </c:pt>
                 <c:pt idx="4">
-                  <c:v>15000</c:v>
+                  <c:v>16500</c:v>
                 </c:pt>
                 <c:pt idx="5">
-                  <c:v>21800</c:v>
+                  <c:v>24000</c:v>
                 </c:pt>
                 <c:pt idx="6">
-                  <c:v>21800</c:v>
+                  <c:v>24000</c:v>
                 </c:pt>
                 <c:pt idx="7">
-                  <c:v>21800</c:v>
+                  <c:v>24000</c:v>
                 </c:pt>
                 <c:pt idx="8">
-                  <c:v>21800</c:v>
+                  <c:v>24000</c:v>
                 </c:pt>
                 <c:pt idx="9">
-                  <c:v>16300</c:v>
+                  <c:v>17900</c:v>
                 </c:pt>
                 <c:pt idx="10">
-                  <c:v>16300</c:v>
+                  <c:v>17900</c:v>
                 </c:pt>
                 <c:pt idx="11">
-                  <c:v>16300</c:v>
+                  <c:v>17900</c:v>
                 </c:pt>
                 <c:pt idx="12">
-                  <c:v>16300</c:v>
+                  <c:v>17900</c:v>
                 </c:pt>
                 <c:pt idx="13">
-                  <c:v>28300</c:v>
+                  <c:v>31100</c:v>
                 </c:pt>
               </c:numCache>
             </c:numRef>
@@ -808,7 +808,7 @@
         <c:axId val="-2100718248"/>
         <c:scaling>
           <c:orientation val="minMax"/>
-          <c:max val="30000.0"/>
+          <c:max val="40000.0"/>
           <c:min val="0.0"/>
         </c:scaling>
         <c:delete val="0"/>
@@ -972,46 +972,46 @@
                 <c:formatCode>$#,##0;[Red]($#,##0);"-"</c:formatCode>
                 <c:ptCount val="14"/>
                 <c:pt idx="0">
-                  <c:v>8800</c:v>
+                  <c:v>9700</c:v>
                 </c:pt>
                 <c:pt idx="1">
-                  <c:v>4600</c:v>
+                  <c:v>5100</c:v>
                 </c:pt>
                 <c:pt idx="2">
-                  <c:v>5200</c:v>
+                  <c:v>5700</c:v>
                 </c:pt>
                 <c:pt idx="3">
-                  <c:v>6400</c:v>
+                  <c:v>7000</c:v>
                 </c:pt>
                 <c:pt idx="4">
-                  <c:v>11600</c:v>
+                  <c:v>12700</c:v>
                 </c:pt>
                 <c:pt idx="5">
-                  <c:v>6400</c:v>
+                  <c:v>7000</c:v>
                 </c:pt>
                 <c:pt idx="6">
-                  <c:v>4600</c:v>
+                  <c:v>5100</c:v>
                 </c:pt>
                 <c:pt idx="7">
-                  <c:v>14000</c:v>
+                  <c:v>15400</c:v>
                 </c:pt>
                 <c:pt idx="8">
-                  <c:v>3900</c:v>
+                  <c:v>4300</c:v>
                 </c:pt>
                 <c:pt idx="9">
-                  <c:v>5200</c:v>
+                  <c:v>5700</c:v>
                 </c:pt>
                 <c:pt idx="10">
-                  <c:v>6400</c:v>
+                  <c:v>7000</c:v>
                 </c:pt>
                 <c:pt idx="11">
-                  <c:v>5200</c:v>
+                  <c:v>5700</c:v>
                 </c:pt>
                 <c:pt idx="12">
-                  <c:v>9100</c:v>
+                  <c:v>10000</c:v>
                 </c:pt>
                 <c:pt idx="13">
-                  <c:v>8800</c:v>
+                  <c:v>9700</c:v>
                 </c:pt>
               </c:numCache>
             </c:numRef>
@@ -1060,7 +1060,7 @@
         <c:axId val="-2100718248"/>
         <c:scaling>
           <c:orientation val="minMax"/>
-          <c:max val="15000.0"/>
+          <c:max val="20000.0"/>
           <c:min val="0.0"/>
         </c:scaling>
         <c:delete val="0"/>
@@ -1585,7 +1585,7 @@
           <a:lstStyle/>
           <a:p>
             <a:r>
-              <a:t>Services · All. November against November last year: (22.4%); Year to date (Jul to Nov 2025): $362,530; Gross margin, year to date: 63.8%. Revenue is $362,530 this financial year to date (Jul to Nov 2025). Training makes the highest gross margin (75.8%); Projects the lowest (61.4%). The business needs 74.4% gross margin just to cover overheads. Projects: 61.4% gross margin, 21.4 points over the 40.0% target ($50,078 ahead on $234,330 this financial year to date). Training: 75.8% gross margin, 35.8 points over the 40.0% target ($12,420 ahead on $34,700 this financial year to date).</a:t>
+              <a:t>Services · All. November against November last year: (21.8%); Year to date (Jul to Nov 2025): $399,325; Gross margin, year to date: 67.2%. Revenue is $399,325 this financial year to date (Jul to Nov 2025). Training makes the highest gross margin (78.0%); Projects the lowest (65.0%). The business needs 74.9% gross margin just to cover overheads. Projects: 65.0% gross margin, 25.0 points over the 40.0% target ($64,595 ahead on $258,525 this financial year to date). Training: 78.0% gross margin, 38.0 points over the 40.0% target ($14,460 ahead on $38,100 this financial year to date).</a:t>
             </a:r>
           </a:p>
         </p:txBody>
@@ -1655,7 +1655,7 @@
           <a:lstStyle/>
           <a:p>
             <a:r>
-              <a:t>Services · Projects. November against November last year: (47.1%); Year to date (Jul to Nov 2025): $234,330; Gross margin, year to date: 61.4%. Projects brought in $234,330 this financial year to date, at a 61.4% gross margin (below the 63.8% overall). Projects: 61.4% gross margin, 21.4 points over the 40.0% target ($50,078 ahead on $234,330 this financial year to date).</a:t>
+              <a:t>Services · Projects. November against November last year: (46.5%); Year to date (Jul to Nov 2025): $258,525; Gross margin, year to date: 65.0%. Projects brought in $258,525 this financial year to date, at a 65.0% gross margin (below the 67.2% overall). Projects: 65.0% gross margin, 25.0 points over the 40.0% target ($64,595 ahead on $258,525 this financial year to date).</a:t>
             </a:r>
           </a:p>
         </p:txBody>
@@ -1725,7 +1725,7 @@
           <a:lstStyle/>
           <a:p>
             <a:r>
-              <a:t>Services · Retainers. November against November last year: 88.7%; Year to date (Jul to Nov 2025): $93,500; Gross margin, year to date: 65.5%. Retainers brought in $93,500 this financial year to date, at a 65.5% gross margin (above the 63.8% overall). Retainers: 65.5% gross margin, 25.5 points over the 40.0% target ($23,880 ahead on $93,500 this financial year to date).</a:t>
+              <a:t>Services · Retainers. November against November last year: 88.5%; Year to date (Jul to Nov 2025): $102,700; Gross margin, year to date: 68.6%. Retainers brought in $102,700 this financial year to date, at a 68.6% gross margin (above the 67.2% overall). Retainers: 68.6% gross margin, 28.6 points over the 40.0% target ($29,400 ahead on $102,700 this financial year to date).</a:t>
             </a:r>
           </a:p>
         </p:txBody>
@@ -1795,7 +1795,7 @@
           <a:lstStyle/>
           <a:p>
             <a:r>
-              <a:t>Services · Training. November against November last year: 91.3%; Year to date (Jul to Nov 2025): $34,700; Gross margin, year to date: 75.8%. Training brought in $34,700 this financial year to date, at a 75.8% gross margin (above the 63.8% overall). Training: 75.8% gross margin, 35.8 points over the 40.0% target ($12,420 ahead on $34,700 this financial year to date).</a:t>
+              <a:t>Services · Training. November against November last year: 90.2%; Year to date (Jul to Nov 2025): $38,100; Gross margin, year to date: 78.0%. Training brought in $38,100 this financial year to date, at a 78.0% gross margin (above the 67.2% overall). Training: 78.0% gross margin, 38.0 points over the 40.0% target ($14,460 ahead on $38,100 this financial year to date).</a:t>
             </a:r>
           </a:p>
         </p:txBody>
@@ -1865,7 +1865,7 @@
           <a:lstStyle/>
           <a:p>
             <a:r>
-              <a:t>By type of work: financial year to date (Jul to Nov 2025) against the same period last year · Services. Same period last year: Not available: the data starts October 2024. From gross margin to profit: November's client work made $52,800 gross margin (62.9%). Consultant time not charged to client work took $11,210 and overheads $51,270, leaving ($9,680) profit before tax ((11.5%) of revenue). To cover overheads, client work needs a 74.4% gross margin on average.</a:t>
+              <a:t>By type of work: financial year to date (Jul to Nov 2025) against the same period last year · Services. Same period last year: Not available: the data starts October 2024. From gross margin to profit: November's client work made $61,435 gross margin (66.4%). Consultant time not charged to client work took $18,060 and overheads $51,270, leaving ($7,895) profit before tax ((8.5%) of revenue). To cover overheads, client work needs a 74.9% gross margin on average.</a:t>
             </a:r>
           </a:p>
         </p:txBody>
@@ -5280,7 +5280,7 @@
                 </a:solidFill>
                 <a:latin typeface="Roboto"/>
               </a:rPr>
-              <a:t>Data retrieved 2pm, Tue 6 Oct 2026 · Generated 8 Oct 2026, 9:35am · Sample data · Made with Python (python-pptx)</a:t>
+              <a:t>Data retrieved 2pm, Tue 6 Oct 2026 · Generated 9 Oct 2026, 8:41am · Sample data · Made with Python (python-pptx)</a:t>
             </a:r>
           </a:p>
         </p:txBody>
@@ -5626,7 +5626,7 @@
                 </a:solidFill>
                 <a:latin typeface="Roboto"/>
               </a:rPr>
-              <a:t>(22.4%)</a:t>
+              <a:t>(21.8%)</a:t>
             </a:r>
           </a:p>
         </p:txBody>
@@ -5665,7 +5665,7 @@
                 </a:solidFill>
                 <a:latin typeface="Roboto"/>
               </a:rPr>
-              <a:t>$83,940 against $108,140</a:t>
+              <a:t>$92,575 against $118,390</a:t>
             </a:r>
           </a:p>
         </p:txBody>
@@ -5792,7 +5792,7 @@
                 </a:solidFill>
                 <a:latin typeface="Roboto"/>
               </a:rPr>
-              <a:t>$362,530</a:t>
+              <a:t>$399,325</a:t>
             </a:r>
           </a:p>
         </p:txBody>
@@ -5958,7 +5958,7 @@
                 </a:solidFill>
                 <a:latin typeface="Roboto"/>
               </a:rPr>
-              <a:t>63.8%</a:t>
+              <a:t>67.2%</a:t>
             </a:r>
           </a:p>
         </p:txBody>
@@ -5997,7 +5997,7 @@
                 </a:solidFill>
                 <a:latin typeface="Roboto"/>
               </a:rPr>
-              <a:t>$231,390 before overheads</a:t>
+              <a:t>$268,185 before overheads</a:t>
             </a:r>
           </a:p>
         </p:txBody>
@@ -6142,7 +6142,7 @@
                 </a:solidFill>
                 <a:latin typeface="Roboto"/>
               </a:rPr>
-              <a:t>Revenue is $362,530 this financial year to date (Jul to Nov 2025). Training makes the highest gross margin (75.8%); Projects the lowest (61.4%). The business needs 74.4% gross margin just to cover overheads.</a:t>
+              <a:t>Revenue is $399,325 this financial year to date (Jul to Nov 2025). Training makes the highest gross margin (78.0%); Projects the lowest (65.0%). The business needs 74.9% gross margin just to cover overheads.</a:t>
             </a:r>
           </a:p>
         </p:txBody>
@@ -6269,7 +6269,7 @@
                 </a:solidFill>
                 <a:latin typeface="Roboto"/>
               </a:rPr>
-              <a:t>Projects: 61.4% gross margin, 21.4 points over the 40.0% target ($50,078 ahead on $234,330 this financial year to date). Training: 75.8% gross margin, 35.8 points over the 40.0% target ($12,420 ahead on $34,700 this financial year to date).</a:t>
+              <a:t>Projects: 65.0% gross margin, 25.0 points over the 40.0% target ($64,595 ahead on $258,525 this financial year to date). Training: 78.0% gross margin, 38.0 points over the 40.0% target ($14,460 ahead on $38,100 this financial year to date).</a:t>
             </a:r>
           </a:p>
         </p:txBody>
@@ -6347,7 +6347,7 @@
                 </a:solidFill>
                 <a:latin typeface="Roboto"/>
               </a:rPr>
-              <a:t>Data retrieved 2pm, Tue 6 Oct 2026 · Generated 8 Oct 2026, 9:35am · Sample data · Made with Python (python-pptx)</a:t>
+              <a:t>Data retrieved 2pm, Tue 6 Oct 2026 · Generated 9 Oct 2026, 8:41am · Sample data · Made with Python (python-pptx)</a:t>
             </a:r>
           </a:p>
         </p:txBody>
@@ -6693,7 +6693,7 @@
                 </a:solidFill>
                 <a:latin typeface="Roboto"/>
               </a:rPr>
-              <a:t>(47.1%)</a:t>
+              <a:t>(46.5%)</a:t>
             </a:r>
           </a:p>
         </p:txBody>
@@ -6732,7 +6732,7 @@
                 </a:solidFill>
                 <a:latin typeface="Roboto"/>
               </a:rPr>
-              <a:t>$46,840 against $88,540</a:t>
+              <a:t>$51,775 against $96,790</a:t>
             </a:r>
           </a:p>
         </p:txBody>
@@ -6859,7 +6859,7 @@
                 </a:solidFill>
                 <a:latin typeface="Roboto"/>
               </a:rPr>
-              <a:t>$234,330</a:t>
+              <a:t>$258,525</a:t>
             </a:r>
           </a:p>
         </p:txBody>
@@ -7025,7 +7025,7 @@
                 </a:solidFill>
                 <a:latin typeface="Roboto"/>
               </a:rPr>
-              <a:t>61.4%</a:t>
+              <a:t>65.0%</a:t>
             </a:r>
           </a:p>
         </p:txBody>
@@ -7064,7 +7064,7 @@
                 </a:solidFill>
                 <a:latin typeface="Roboto"/>
               </a:rPr>
-              <a:t>$143,810 before overheads</a:t>
+              <a:t>$168,005 before overheads</a:t>
             </a:r>
           </a:p>
         </p:txBody>
@@ -7209,7 +7209,7 @@
                 </a:solidFill>
                 <a:latin typeface="Roboto"/>
               </a:rPr>
-              <a:t>Projects brought in $234,330 this financial year to date, at a 61.4% gross margin (below the 63.8% overall).</a:t>
+              <a:t>Projects brought in $258,525 this financial year to date, at a 65.0% gross margin (below the 67.2% overall).</a:t>
             </a:r>
           </a:p>
         </p:txBody>
@@ -7336,7 +7336,7 @@
                 </a:solidFill>
                 <a:latin typeface="Roboto"/>
               </a:rPr>
-              <a:t>Projects: 61.4% gross margin, 21.4 points over the 40.0% target ($50,078 ahead on $234,330 this financial year to date).</a:t>
+              <a:t>Projects: 65.0% gross margin, 25.0 points over the 40.0% target ($64,595 ahead on $258,525 this financial year to date).</a:t>
             </a:r>
           </a:p>
         </p:txBody>
@@ -7414,7 +7414,7 @@
                 </a:solidFill>
                 <a:latin typeface="Roboto"/>
               </a:rPr>
-              <a:t>Data retrieved 2pm, Tue 6 Oct 2026 · Generated 8 Oct 2026, 9:35am · Sample data · Made with Python (python-pptx)</a:t>
+              <a:t>Data retrieved 2pm, Tue 6 Oct 2026 · Generated 9 Oct 2026, 8:41am · Sample data · Made with Python (python-pptx)</a:t>
             </a:r>
           </a:p>
         </p:txBody>
@@ -7760,7 +7760,7 @@
                 </a:solidFill>
                 <a:latin typeface="Roboto"/>
               </a:rPr>
-              <a:t>88.7%</a:t>
+              <a:t>88.5%</a:t>
             </a:r>
           </a:p>
         </p:txBody>
@@ -7799,7 +7799,7 @@
                 </a:solidFill>
                 <a:latin typeface="Roboto"/>
               </a:rPr>
-              <a:t>$28,300 against $15,000</a:t>
+              <a:t>$31,100 against $16,500</a:t>
             </a:r>
           </a:p>
         </p:txBody>
@@ -7926,7 +7926,7 @@
                 </a:solidFill>
                 <a:latin typeface="Roboto"/>
               </a:rPr>
-              <a:t>$93,500</a:t>
+              <a:t>$102,700</a:t>
             </a:r>
           </a:p>
         </p:txBody>
@@ -8092,7 +8092,7 @@
                 </a:solidFill>
                 <a:latin typeface="Roboto"/>
               </a:rPr>
-              <a:t>65.5%</a:t>
+              <a:t>68.6%</a:t>
             </a:r>
           </a:p>
         </p:txBody>
@@ -8131,7 +8131,7 @@
                 </a:solidFill>
                 <a:latin typeface="Roboto"/>
               </a:rPr>
-              <a:t>$61,280 before overheads</a:t>
+              <a:t>$70,480 before overheads</a:t>
             </a:r>
           </a:p>
         </p:txBody>
@@ -8276,7 +8276,7 @@
                 </a:solidFill>
                 <a:latin typeface="Roboto"/>
               </a:rPr>
-              <a:t>Retainers brought in $93,500 this financial year to date, at a 65.5% gross margin (above the 63.8% overall).</a:t>
+              <a:t>Retainers brought in $102,700 this financial year to date, at a 68.6% gross margin (above the 67.2% overall).</a:t>
             </a:r>
           </a:p>
         </p:txBody>
@@ -8403,7 +8403,7 @@
                 </a:solidFill>
                 <a:latin typeface="Roboto"/>
               </a:rPr>
-              <a:t>Retainers: 65.5% gross margin, 25.5 points over the 40.0% target ($23,880 ahead on $93,500 this financial year to date).</a:t>
+              <a:t>Retainers: 68.6% gross margin, 28.6 points over the 40.0% target ($29,400 ahead on $102,700 this financial year to date).</a:t>
             </a:r>
           </a:p>
         </p:txBody>
@@ -8481,7 +8481,7 @@
                 </a:solidFill>
                 <a:latin typeface="Roboto"/>
               </a:rPr>
-              <a:t>Data retrieved 2pm, Tue 6 Oct 2026 · Generated 8 Oct 2026, 9:35am · Sample data · Made with Python (python-pptx)</a:t>
+              <a:t>Data retrieved 2pm, Tue 6 Oct 2026 · Generated 9 Oct 2026, 8:41am · Sample data · Made with Python (python-pptx)</a:t>
             </a:r>
           </a:p>
         </p:txBody>
@@ -8827,7 +8827,7 @@
                 </a:solidFill>
                 <a:latin typeface="Roboto"/>
               </a:rPr>
-              <a:t>91.3%</a:t>
+              <a:t>90.2%</a:t>
             </a:r>
           </a:p>
         </p:txBody>
@@ -8866,7 +8866,7 @@
                 </a:solidFill>
                 <a:latin typeface="Roboto"/>
               </a:rPr>
-              <a:t>$8,800 against $4,600</a:t>
+              <a:t>$9,700 against $5,100</a:t>
             </a:r>
           </a:p>
         </p:txBody>
@@ -8993,7 +8993,7 @@
                 </a:solidFill>
                 <a:latin typeface="Roboto"/>
               </a:rPr>
-              <a:t>$34,700</a:t>
+              <a:t>$38,100</a:t>
             </a:r>
           </a:p>
         </p:txBody>
@@ -9159,7 +9159,7 @@
                 </a:solidFill>
                 <a:latin typeface="Roboto"/>
               </a:rPr>
-              <a:t>75.8%</a:t>
+              <a:t>78.0%</a:t>
             </a:r>
           </a:p>
         </p:txBody>
@@ -9198,7 +9198,7 @@
                 </a:solidFill>
                 <a:latin typeface="Roboto"/>
               </a:rPr>
-              <a:t>$26,300 before overheads</a:t>
+              <a:t>$29,700 before overheads</a:t>
             </a:r>
           </a:p>
         </p:txBody>
@@ -9343,7 +9343,7 @@
                 </a:solidFill>
                 <a:latin typeface="Roboto"/>
               </a:rPr>
-              <a:t>Training brought in $34,700 this financial year to date, at a 75.8% gross margin (above the 63.8% overall).</a:t>
+              <a:t>Training brought in $38,100 this financial year to date, at a 78.0% gross margin (above the 67.2% overall).</a:t>
             </a:r>
           </a:p>
         </p:txBody>
@@ -9470,7 +9470,7 @@
                 </a:solidFill>
                 <a:latin typeface="Roboto"/>
               </a:rPr>
-              <a:t>Training: 75.8% gross margin, 35.8 points over the 40.0% target ($12,420 ahead on $34,700 this financial year to date).</a:t>
+              <a:t>Training: 78.0% gross margin, 38.0 points over the 40.0% target ($14,460 ahead on $38,100 this financial year to date).</a:t>
             </a:r>
           </a:p>
         </p:txBody>
@@ -9548,7 +9548,7 @@
                 </a:solidFill>
                 <a:latin typeface="Roboto"/>
               </a:rPr>
-              <a:t>Data retrieved 2pm, Tue 6 Oct 2026 · Generated 8 Oct 2026, 9:35am · Sample data · Made with Python (python-pptx)</a:t>
+              <a:t>Data retrieved 2pm, Tue 6 Oct 2026 · Generated 9 Oct 2026, 8:41am · Sample data · Made with Python (python-pptx)</a:t>
             </a:r>
           </a:p>
         </p:txBody>
@@ -9767,7 +9767,7 @@
                 </a:solidFill>
                 <a:latin typeface="Roboto"/>
               </a:rPr>
-              <a:t>Same period last year: Not available: the data starts October 2024. From gross margin to profit: November's client work made $52,800 gross margin (62.9%). Consultant time not charged to client work took $11,210 and overheads $51,270, leaving ($9,680) profit before tax ((11.5%) of revenue). To cover overheads, client work needs a 74.4% gross margin on average.</a:t>
+              <a:t>Same period last year: Not available: the data starts October 2024. From gross margin to profit: November's client work made $61,435 gross margin (66.4%). Consultant time not charged to client work took $18,060 and overheads $51,270, leaving ($7,895) profit before tax ((8.5%) of revenue). To cover overheads, client work needs a 74.9% gross margin on average.</a:t>
             </a:r>
           </a:p>
         </p:txBody>
@@ -9998,7 +9998,7 @@
                           </a:solidFill>
                           <a:latin typeface="Roboto"/>
                         </a:rPr>
-                        <a:t>$234,330</a:t>
+                        <a:t>$258,525</a:t>
                       </a:r>
                     </a:p>
                   </a:txBody>
@@ -10079,7 +10079,7 @@
                           </a:solidFill>
                           <a:latin typeface="Roboto"/>
                         </a:rPr>
-                        <a:t>$143,810</a:t>
+                        <a:t>$168,005</a:t>
                       </a:r>
                     </a:p>
                   </a:txBody>
@@ -10106,7 +10106,7 @@
                           </a:solidFill>
                           <a:latin typeface="Roboto"/>
                         </a:rPr>
-                        <a:t>61.4%</a:t>
+                        <a:t>65.0%</a:t>
                       </a:r>
                     </a:p>
                   </a:txBody>
@@ -10162,7 +10162,7 @@
                           </a:solidFill>
                           <a:latin typeface="Roboto"/>
                         </a:rPr>
-                        <a:t>$93,500</a:t>
+                        <a:t>$102,700</a:t>
                       </a:r>
                     </a:p>
                   </a:txBody>
@@ -10243,7 +10243,7 @@
                           </a:solidFill>
                           <a:latin typeface="Roboto"/>
                         </a:rPr>
-                        <a:t>$61,280</a:t>
+                        <a:t>$70,480</a:t>
                       </a:r>
                     </a:p>
                   </a:txBody>
@@ -10270,7 +10270,7 @@
                           </a:solidFill>
                           <a:latin typeface="Roboto"/>
                         </a:rPr>
-                        <a:t>65.5%</a:t>
+                        <a:t>68.6%</a:t>
                       </a:r>
                     </a:p>
                   </a:txBody>
@@ -10326,7 +10326,7 @@
                           </a:solidFill>
                           <a:latin typeface="Roboto"/>
                         </a:rPr>
-                        <a:t>$34,700</a:t>
+                        <a:t>$38,100</a:t>
                       </a:r>
                     </a:p>
                   </a:txBody>
@@ -10407,7 +10407,7 @@
                           </a:solidFill>
                           <a:latin typeface="Roboto"/>
                         </a:rPr>
-                        <a:t>$26,300</a:t>
+                        <a:t>$29,700</a:t>
                       </a:r>
                     </a:p>
                   </a:txBody>
@@ -10434,7 +10434,7 @@
                           </a:solidFill>
                           <a:latin typeface="Roboto"/>
                         </a:rPr>
-                        <a:t>75.8%</a:t>
+                        <a:t>78.0%</a:t>
                       </a:r>
                     </a:p>
                   </a:txBody>
@@ -10490,7 +10490,7 @@
                           </a:solidFill>
                           <a:latin typeface="Roboto"/>
                         </a:rPr>
-                        <a:t>$362,530</a:t>
+                        <a:t>$399,325</a:t>
                       </a:r>
                     </a:p>
                   </a:txBody>
@@ -10571,7 +10571,7 @@
                           </a:solidFill>
                           <a:latin typeface="Roboto"/>
                         </a:rPr>
-                        <a:t>$231,390</a:t>
+                        <a:t>$268,185</a:t>
                       </a:r>
                     </a:p>
                   </a:txBody>
@@ -10598,7 +10598,7 @@
                           </a:solidFill>
                           <a:latin typeface="Roboto"/>
                         </a:rPr>
-                        <a:t>63.8%</a:t>
+                        <a:t>67.2%</a:t>
                       </a:r>
                     </a:p>
                   </a:txBody>
@@ -10686,7 +10686,7 @@
                 </a:solidFill>
                 <a:latin typeface="Roboto"/>
               </a:rPr>
-              <a:t>Data retrieved 2pm, Tue 6 Oct 2026 · Generated 8 Oct 2026, 9:35am · Sample data · Made with Python (python-pptx)</a:t>
+              <a:t>Data retrieved 2pm, Tue 6 Oct 2026 · Generated 9 Oct 2026, 8:41am · Sample data · Made with Python (python-pptx)</a:t>
             </a:r>
           </a:p>
         </p:txBody>
